--- a/PPTs/Ch8_ARM_Subroutines_Exercises.pptx
+++ b/PPTs/Ch8_ARM_Subroutines_Exercises.pptx
@@ -5,10 +5,10 @@
     <p:sldMasterId id="2147483660" r:id="rId1"/>
   </p:sldMasterIdLst>
   <p:notesMasterIdLst>
-    <p:notesMasterId r:id="rId13"/>
+    <p:notesMasterId r:id="rId14"/>
   </p:notesMasterIdLst>
   <p:handoutMasterIdLst>
-    <p:handoutMasterId r:id="rId14"/>
+    <p:handoutMasterId r:id="rId15"/>
   </p:handoutMasterIdLst>
   <p:sldIdLst>
     <p:sldId id="256" r:id="rId2"/>
@@ -22,6 +22,7 @@
     <p:sldId id="353" r:id="rId10"/>
     <p:sldId id="354" r:id="rId11"/>
     <p:sldId id="751" r:id="rId12"/>
+    <p:sldId id="763" r:id="rId13"/>
   </p:sldIdLst>
   <p:sldSz cx="9144000" cy="6858000" type="screen4x3"/>
   <p:notesSz cx="6950075" cy="9236075"/>
@@ -142,7 +143,7 @@
 <file path=ppt/revisionInfo.xml><?xml version="1.0" encoding="utf-8"?>
 <p1510:revInfo xmlns:a="http://schemas.openxmlformats.org/drawingml/2006/main" xmlns:r="http://schemas.openxmlformats.org/officeDocument/2006/relationships" xmlns:p1510="http://schemas.microsoft.com/office/powerpoint/2015/10/main">
   <p1510:revLst>
-    <p1510:client id="{43565B01-D304-4B37-91FF-22EECAD3EFF0}" v="1" dt="2025-10-05T02:53:43.754"/>
+    <p1510:client id="{BB5062DF-8177-434E-B118-2B5E45DF7CD2}" v="1" dt="2025-10-21T19:03:41.092"/>
   </p1510:revLst>
 </p1510:revInfo>
 </file>
@@ -152,7 +153,7 @@
   <pc:docChgLst>
     <pc:chgData name="Zonghua Gu" userId="9a7e1853e1951ef5" providerId="LiveId" clId="{CF1FAA12-072C-4ED5-BA76-0FFFAEFDB88A}"/>
     <pc:docChg chg="addSld delSld modSld">
-      <pc:chgData name="Zonghua Gu" userId="9a7e1853e1951ef5" providerId="LiveId" clId="{CF1FAA12-072C-4ED5-BA76-0FFFAEFDB88A}" dt="2025-10-05T02:53:43.754" v="13"/>
+      <pc:chgData name="Zonghua Gu" userId="9a7e1853e1951ef5" providerId="LiveId" clId="{CF1FAA12-072C-4ED5-BA76-0FFFAEFDB88A}" dt="2025-10-21T19:03:41.087" v="14"/>
       <pc:docMkLst>
         <pc:docMk/>
       </pc:docMkLst>
@@ -171,62 +172,6 @@
           </ac:spMkLst>
         </pc:spChg>
       </pc:sldChg>
-      <pc:sldChg chg="del">
-        <pc:chgData name="Zonghua Gu" userId="9a7e1853e1951ef5" providerId="LiveId" clId="{CF1FAA12-072C-4ED5-BA76-0FFFAEFDB88A}" dt="2025-10-05T02:47:15.353" v="6" actId="47"/>
-        <pc:sldMkLst>
-          <pc:docMk/>
-          <pc:sldMk cId="1814278120" sldId="258"/>
-        </pc:sldMkLst>
-      </pc:sldChg>
-      <pc:sldChg chg="del">
-        <pc:chgData name="Zonghua Gu" userId="9a7e1853e1951ef5" providerId="LiveId" clId="{CF1FAA12-072C-4ED5-BA76-0FFFAEFDB88A}" dt="2025-10-05T02:47:10.945" v="3" actId="47"/>
-        <pc:sldMkLst>
-          <pc:docMk/>
-          <pc:sldMk cId="3884894996" sldId="260"/>
-        </pc:sldMkLst>
-      </pc:sldChg>
-      <pc:sldChg chg="del">
-        <pc:chgData name="Zonghua Gu" userId="9a7e1853e1951ef5" providerId="LiveId" clId="{CF1FAA12-072C-4ED5-BA76-0FFFAEFDB88A}" dt="2025-10-05T02:47:10.129" v="2" actId="47"/>
-        <pc:sldMkLst>
-          <pc:docMk/>
-          <pc:sldMk cId="2007294765" sldId="263"/>
-        </pc:sldMkLst>
-      </pc:sldChg>
-      <pc:sldChg chg="del">
-        <pc:chgData name="Zonghua Gu" userId="9a7e1853e1951ef5" providerId="LiveId" clId="{CF1FAA12-072C-4ED5-BA76-0FFFAEFDB88A}" dt="2025-10-05T02:47:08.877" v="1" actId="47"/>
-        <pc:sldMkLst>
-          <pc:docMk/>
-          <pc:sldMk cId="1120632604" sldId="278"/>
-        </pc:sldMkLst>
-      </pc:sldChg>
-      <pc:sldChg chg="del">
-        <pc:chgData name="Zonghua Gu" userId="9a7e1853e1951ef5" providerId="LiveId" clId="{CF1FAA12-072C-4ED5-BA76-0FFFAEFDB88A}" dt="2025-10-05T02:47:08.877" v="1" actId="47"/>
-        <pc:sldMkLst>
-          <pc:docMk/>
-          <pc:sldMk cId="424972285" sldId="279"/>
-        </pc:sldMkLst>
-      </pc:sldChg>
-      <pc:sldChg chg="del">
-        <pc:chgData name="Zonghua Gu" userId="9a7e1853e1951ef5" providerId="LiveId" clId="{CF1FAA12-072C-4ED5-BA76-0FFFAEFDB88A}" dt="2025-10-05T02:47:16.070" v="7" actId="47"/>
-        <pc:sldMkLst>
-          <pc:docMk/>
-          <pc:sldMk cId="623618619" sldId="282"/>
-        </pc:sldMkLst>
-      </pc:sldChg>
-      <pc:sldChg chg="del">
-        <pc:chgData name="Zonghua Gu" userId="9a7e1853e1951ef5" providerId="LiveId" clId="{CF1FAA12-072C-4ED5-BA76-0FFFAEFDB88A}" dt="2025-10-05T02:47:16.920" v="8" actId="47"/>
-        <pc:sldMkLst>
-          <pc:docMk/>
-          <pc:sldMk cId="3387447015" sldId="286"/>
-        </pc:sldMkLst>
-      </pc:sldChg>
-      <pc:sldChg chg="del">
-        <pc:chgData name="Zonghua Gu" userId="9a7e1853e1951ef5" providerId="LiveId" clId="{CF1FAA12-072C-4ED5-BA76-0FFFAEFDB88A}" dt="2025-10-05T02:47:08.877" v="1" actId="47"/>
-        <pc:sldMkLst>
-          <pc:docMk/>
-          <pc:sldMk cId="2083494270" sldId="352"/>
-        </pc:sldMkLst>
-      </pc:sldChg>
       <pc:sldChg chg="add del">
         <pc:chgData name="Zonghua Gu" userId="9a7e1853e1951ef5" providerId="LiveId" clId="{CF1FAA12-072C-4ED5-BA76-0FFFAEFDB88A}" dt="2025-10-05T02:53:43.754" v="13"/>
         <pc:sldMkLst>
@@ -241,32 +186,11 @@
           <pc:sldMk cId="4056115254" sldId="354"/>
         </pc:sldMkLst>
       </pc:sldChg>
-      <pc:sldChg chg="del">
-        <pc:chgData name="Zonghua Gu" userId="9a7e1853e1951ef5" providerId="LiveId" clId="{CF1FAA12-072C-4ED5-BA76-0FFFAEFDB88A}" dt="2025-10-05T02:47:12.256" v="4" actId="47"/>
+      <pc:sldChg chg="add">
+        <pc:chgData name="Zonghua Gu" userId="9a7e1853e1951ef5" providerId="LiveId" clId="{CF1FAA12-072C-4ED5-BA76-0FFFAEFDB88A}" dt="2025-10-21T19:03:41.087" v="14"/>
         <pc:sldMkLst>
           <pc:docMk/>
-          <pc:sldMk cId="2345755417" sldId="369"/>
-        </pc:sldMkLst>
-      </pc:sldChg>
-      <pc:sldChg chg="del">
-        <pc:chgData name="Zonghua Gu" userId="9a7e1853e1951ef5" providerId="LiveId" clId="{CF1FAA12-072C-4ED5-BA76-0FFFAEFDB88A}" dt="2025-10-05T02:47:13.941" v="5" actId="47"/>
-        <pc:sldMkLst>
-          <pc:docMk/>
-          <pc:sldMk cId="2574940037" sldId="374"/>
-        </pc:sldMkLst>
-      </pc:sldChg>
-      <pc:sldChg chg="del">
-        <pc:chgData name="Zonghua Gu" userId="9a7e1853e1951ef5" providerId="LiveId" clId="{CF1FAA12-072C-4ED5-BA76-0FFFAEFDB88A}" dt="2025-10-05T02:47:22.378" v="11" actId="47"/>
-        <pc:sldMkLst>
-          <pc:docMk/>
-          <pc:sldMk cId="658532706" sldId="752"/>
-        </pc:sldMkLst>
-      </pc:sldChg>
-      <pc:sldChg chg="del">
-        <pc:chgData name="Zonghua Gu" userId="9a7e1853e1951ef5" providerId="LiveId" clId="{CF1FAA12-072C-4ED5-BA76-0FFFAEFDB88A}" dt="2025-10-05T02:47:23.093" v="12" actId="47"/>
-        <pc:sldMkLst>
-          <pc:docMk/>
-          <pc:sldMk cId="1757812227" sldId="756"/>
+          <pc:sldMk cId="4214831448" sldId="763"/>
         </pc:sldMkLst>
       </pc:sldChg>
     </pc:docChg>
@@ -368,7 +292,7 @@
           <a:p>
             <a:fld id="{3B161579-C726-4AFD-89FC-66D961EAF8EA}" type="datetimeFigureOut">
               <a:rPr lang="en-US" smtClean="0"/>
-              <a:t>10/4/2025</a:t>
+              <a:t>10/21/2025</a:t>
             </a:fld>
             <a:endParaRPr lang="en-US"/>
           </a:p>
@@ -546,7 +470,7 @@
             <a:fld id="{0C5DCA7A-C3FD-4606-A3AD-864BD96433D4}" type="datetimeFigureOut">
               <a:rPr lang="en-US" smtClean="0"/>
               <a:pPr/>
-              <a:t>10/4/2025</a:t>
+              <a:t>10/21/2025</a:t>
             </a:fld>
             <a:endParaRPr lang="en-US"/>
           </a:p>
@@ -1125,6 +1049,327 @@
 </p:notes>
 </file>
 
+<file path=ppt/notesSlides/notesSlide3.xml><?xml version="1.0" encoding="utf-8"?>
+<p:notes xmlns:a="http://schemas.openxmlformats.org/drawingml/2006/main" xmlns:r="http://schemas.openxmlformats.org/officeDocument/2006/relationships" xmlns:p="http://schemas.openxmlformats.org/presentationml/2006/main">
+  <p:cSld>
+    <p:spTree>
+      <p:nvGrpSpPr>
+        <p:cNvPr id="1" name=""/>
+        <p:cNvGrpSpPr/>
+        <p:nvPr/>
+      </p:nvGrpSpPr>
+      <p:grpSpPr>
+        <a:xfrm>
+          <a:off x="0" y="0"/>
+          <a:ext cx="0" cy="0"/>
+          <a:chOff x="0" y="0"/>
+          <a:chExt cx="0" cy="0"/>
+        </a:xfrm>
+      </p:grpSpPr>
+      <p:sp>
+        <p:nvSpPr>
+          <p:cNvPr id="2" name="Slide Image Placeholder 1"/>
+          <p:cNvSpPr>
+            <a:spLocks noGrp="1" noRot="1" noChangeAspect="1"/>
+          </p:cNvSpPr>
+          <p:nvPr>
+            <p:ph type="sldImg"/>
+          </p:nvPr>
+        </p:nvSpPr>
+        <p:spPr/>
+      </p:sp>
+      <p:sp>
+        <p:nvSpPr>
+          <p:cNvPr id="3" name="Notes Placeholder 2"/>
+          <p:cNvSpPr>
+            <a:spLocks noGrp="1"/>
+          </p:cNvSpPr>
+          <p:nvPr>
+            <p:ph type="body" idx="1"/>
+          </p:nvPr>
+        </p:nvSpPr>
+        <p:spPr/>
+        <p:txBody>
+          <a:bodyPr/>
+          <a:lstStyle/>
+          <a:p>
+            <a:r>
+              <a:rPr lang="en-US" dirty="0"/>
+              <a:t>Here’s what the program </a:t>
+            </a:r>
+            <a:r>
+              <a:rPr lang="en-US" i="1" dirty="0"/>
+              <a:t>does in practice</a:t>
+            </a:r>
+            <a:r>
+              <a:rPr lang="en-US" dirty="0"/>
+              <a:t>:</a:t>
+            </a:r>
+          </a:p>
+          <a:p>
+            <a:r>
+              <a:rPr lang="en-US" dirty="0"/>
+              <a:t>It starts with </a:t>
+            </a:r>
+            <a:r>
+              <a:rPr lang="en-US" sz="1200" kern="1200" dirty="0">
+                <a:solidFill>
+                  <a:schemeClr val="tx1"/>
+                </a:solidFill>
+                <a:latin typeface="+mn-lt"/>
+                <a:ea typeface="+mn-ea"/>
+                <a:cs typeface="+mn-cs"/>
+              </a:rPr>
+              <a:t>x0 = 1</a:t>
+            </a:r>
+            <a:r>
+              <a:rPr lang="en-US" dirty="0"/>
+              <a:t>.</a:t>
+            </a:r>
+          </a:p>
+          <a:p>
+            <a:r>
+              <a:rPr lang="en-US" dirty="0"/>
+              <a:t>It loops, incrementing </a:t>
+            </a:r>
+            <a:r>
+              <a:rPr lang="en-US" sz="1200" kern="1200" dirty="0">
+                <a:solidFill>
+                  <a:schemeClr val="tx1"/>
+                </a:solidFill>
+                <a:latin typeface="+mn-lt"/>
+                <a:ea typeface="+mn-ea"/>
+                <a:cs typeface="+mn-cs"/>
+              </a:rPr>
+              <a:t>x0</a:t>
+            </a:r>
+            <a:r>
+              <a:rPr lang="en-US" dirty="0"/>
+              <a:t> each time.</a:t>
+            </a:r>
+          </a:p>
+          <a:p>
+            <a:r>
+              <a:rPr lang="en-US" dirty="0"/>
+              <a:t>When </a:t>
+            </a:r>
+            <a:r>
+              <a:rPr lang="en-US" sz="1200" kern="1200" dirty="0">
+                <a:solidFill>
+                  <a:schemeClr val="tx1"/>
+                </a:solidFill>
+                <a:latin typeface="+mn-lt"/>
+                <a:ea typeface="+mn-ea"/>
+                <a:cs typeface="+mn-cs"/>
+              </a:rPr>
+              <a:t>x0</a:t>
+            </a:r>
+            <a:r>
+              <a:rPr lang="en-US" dirty="0"/>
+              <a:t> reaches </a:t>
+            </a:r>
+            <a:r>
+              <a:rPr lang="en-US" sz="1200" kern="1200" dirty="0">
+                <a:solidFill>
+                  <a:schemeClr val="tx1"/>
+                </a:solidFill>
+                <a:latin typeface="+mn-lt"/>
+                <a:ea typeface="+mn-ea"/>
+                <a:cs typeface="+mn-cs"/>
+              </a:rPr>
+              <a:t>5</a:t>
+            </a:r>
+            <a:r>
+              <a:rPr lang="en-US" dirty="0"/>
+              <a:t>, it calls </a:t>
+            </a:r>
+            <a:r>
+              <a:rPr lang="en-US" sz="1200" kern="1200" dirty="0">
+                <a:solidFill>
+                  <a:schemeClr val="tx1"/>
+                </a:solidFill>
+                <a:latin typeface="+mn-lt"/>
+                <a:ea typeface="+mn-ea"/>
+                <a:cs typeface="+mn-cs"/>
+              </a:rPr>
+              <a:t>call</a:t>
+            </a:r>
+            <a:r>
+              <a:rPr lang="en-US" dirty="0"/>
+              <a:t>.</a:t>
+            </a:r>
+          </a:p>
+          <a:p>
+            <a:r>
+              <a:rPr lang="en-US" sz="1200" kern="1200" dirty="0">
+                <a:solidFill>
+                  <a:schemeClr val="tx1"/>
+                </a:solidFill>
+                <a:latin typeface="+mn-lt"/>
+                <a:ea typeface="+mn-ea"/>
+                <a:cs typeface="+mn-cs"/>
+              </a:rPr>
+              <a:t>call</a:t>
+            </a:r>
+            <a:r>
+              <a:rPr lang="en-US" dirty="0"/>
+              <a:t> adds </a:t>
+            </a:r>
+            <a:r>
+              <a:rPr lang="en-US" sz="1200" kern="1200" dirty="0">
+                <a:solidFill>
+                  <a:schemeClr val="tx1"/>
+                </a:solidFill>
+                <a:latin typeface="+mn-lt"/>
+                <a:ea typeface="+mn-ea"/>
+                <a:cs typeface="+mn-cs"/>
+              </a:rPr>
+              <a:t>255</a:t>
+            </a:r>
+            <a:r>
+              <a:rPr lang="en-US" dirty="0"/>
+              <a:t> to </a:t>
+            </a:r>
+            <a:r>
+              <a:rPr lang="en-US" sz="1200" kern="1200" dirty="0">
+                <a:solidFill>
+                  <a:schemeClr val="tx1"/>
+                </a:solidFill>
+                <a:latin typeface="+mn-lt"/>
+                <a:ea typeface="+mn-ea"/>
+                <a:cs typeface="+mn-cs"/>
+              </a:rPr>
+              <a:t>x7</a:t>
+            </a:r>
+            <a:r>
+              <a:rPr lang="en-US" dirty="0"/>
+              <a:t> and resets </a:t>
+            </a:r>
+            <a:r>
+              <a:rPr lang="en-US" sz="1200" kern="1200" dirty="0">
+                <a:solidFill>
+                  <a:schemeClr val="tx1"/>
+                </a:solidFill>
+                <a:latin typeface="+mn-lt"/>
+                <a:ea typeface="+mn-ea"/>
+                <a:cs typeface="+mn-cs"/>
+              </a:rPr>
+              <a:t>x0</a:t>
+            </a:r>
+            <a:r>
+              <a:rPr lang="en-US" dirty="0"/>
+              <a:t> to </a:t>
+            </a:r>
+            <a:r>
+              <a:rPr lang="en-US" sz="1200" kern="1200" dirty="0">
+                <a:solidFill>
+                  <a:schemeClr val="tx1"/>
+                </a:solidFill>
+                <a:latin typeface="+mn-lt"/>
+                <a:ea typeface="+mn-ea"/>
+                <a:cs typeface="+mn-cs"/>
+              </a:rPr>
+              <a:t>1</a:t>
+            </a:r>
+            <a:r>
+              <a:rPr lang="en-US" dirty="0"/>
+              <a:t>.</a:t>
+            </a:r>
+          </a:p>
+          <a:p>
+            <a:r>
+              <a:rPr lang="en-US" dirty="0"/>
+              <a:t>Control returns to </a:t>
+            </a:r>
+            <a:r>
+              <a:rPr lang="en-US" sz="1200" kern="1200" dirty="0">
+                <a:solidFill>
+                  <a:schemeClr val="tx1"/>
+                </a:solidFill>
+                <a:latin typeface="+mn-lt"/>
+                <a:ea typeface="+mn-ea"/>
+                <a:cs typeface="+mn-cs"/>
+              </a:rPr>
+              <a:t>main</a:t>
+            </a:r>
+            <a:r>
+              <a:rPr lang="en-US" dirty="0"/>
+              <a:t>, and the cycle repeats.</a:t>
+            </a:r>
+          </a:p>
+          <a:p>
+            <a:r>
+              <a:rPr lang="en-US" dirty="0"/>
+              <a:t>So the pattern goes like this:</a:t>
+            </a:r>
+          </a:p>
+          <a:p>
+            <a:pPr rtl="0"/>
+            <a:r>
+              <a:rPr lang="en-US" sz="1200" kern="1200" dirty="0">
+                <a:solidFill>
+                  <a:schemeClr val="tx1"/>
+                </a:solidFill>
+                <a:latin typeface="+mn-lt"/>
+                <a:ea typeface="+mn-ea"/>
+                <a:cs typeface="+mn-cs"/>
+              </a:rPr>
+              <a:t>x0: 1 → 2 → 3 → 4 → 5 → (call resets to 1)</a:t>
+            </a:r>
+          </a:p>
+          <a:p>
+            <a:pPr rtl="0"/>
+            <a:r>
+              <a:rPr lang="en-US" sz="1200" kern="1200" dirty="0">
+                <a:solidFill>
+                  <a:schemeClr val="tx1"/>
+                </a:solidFill>
+                <a:latin typeface="+mn-lt"/>
+                <a:ea typeface="+mn-ea"/>
+                <a:cs typeface="+mn-cs"/>
+              </a:rPr>
+              <a:t>x7: +255 each time x0 reaches 5</a:t>
+            </a:r>
+          </a:p>
+        </p:txBody>
+      </p:sp>
+      <p:sp>
+        <p:nvSpPr>
+          <p:cNvPr id="4" name="Slide Number Placeholder 3"/>
+          <p:cNvSpPr>
+            <a:spLocks noGrp="1"/>
+          </p:cNvSpPr>
+          <p:nvPr>
+            <p:ph type="sldNum" sz="quarter" idx="5"/>
+          </p:nvPr>
+        </p:nvSpPr>
+        <p:spPr/>
+        <p:txBody>
+          <a:bodyPr/>
+          <a:lstStyle/>
+          <a:p>
+            <a:fld id="{D46F4F04-2BB1-473A-9274-1B455085D21A}" type="slidenum">
+              <a:rPr lang="en-US" smtClean="0"/>
+              <a:pPr/>
+              <a:t>12</a:t>
+            </a:fld>
+            <a:endParaRPr lang="en-US"/>
+          </a:p>
+        </p:txBody>
+      </p:sp>
+    </p:spTree>
+    <p:extLst>
+      <p:ext uri="{BB962C8B-B14F-4D97-AF65-F5344CB8AC3E}">
+        <p14:creationId xmlns:p14="http://schemas.microsoft.com/office/powerpoint/2010/main" val="260489798"/>
+      </p:ext>
+    </p:extLst>
+  </p:cSld>
+  <p:clrMapOvr>
+    <a:masterClrMapping/>
+  </p:clrMapOvr>
+</p:notes>
+</file>
+
 <file path=ppt/slideLayouts/slideLayout1.xml><?xml version="1.0" encoding="utf-8"?>
 <p:sldLayout xmlns:a="http://schemas.openxmlformats.org/drawingml/2006/main" xmlns:r="http://schemas.openxmlformats.org/officeDocument/2006/relationships" xmlns:p="http://schemas.openxmlformats.org/presentationml/2006/main" showMasterSp="0" type="title" preserve="1">
   <p:cSld name="Title Slide">
@@ -1267,7 +1512,7 @@
             <a:pPr eaLnBrk="1" latinLnBrk="0" hangingPunct="1"/>
             <a:fld id="{7966D375-7FE4-4861-9EA3-8493E3E81506}" type="datetime1">
               <a:rPr lang="en-US" smtClean="0"/>
-              <a:t>10/4/2025</a:t>
+              <a:t>10/21/2025</a:t>
             </a:fld>
             <a:endParaRPr lang="en-US" sz="1600" dirty="0"/>
           </a:p>
@@ -1627,7 +1872,7 @@
             <a:pPr eaLnBrk="1" latinLnBrk="0" hangingPunct="1"/>
             <a:fld id="{A9C54BE0-D5FE-4C7B-88A7-8835FDA599B1}" type="datetime1">
               <a:rPr lang="en-US" smtClean="0"/>
-              <a:t>10/4/2025</a:t>
+              <a:t>10/21/2025</a:t>
             </a:fld>
             <a:endParaRPr lang="en-US"/>
           </a:p>
@@ -1803,7 +2048,7 @@
             <a:pPr eaLnBrk="1" latinLnBrk="0" hangingPunct="1"/>
             <a:fld id="{F132153C-039A-48A4-AC9F-CEC24D5C2B7A}" type="datetime1">
               <a:rPr lang="en-US" smtClean="0"/>
-              <a:t>10/4/2025</a:t>
+              <a:t>10/21/2025</a:t>
             </a:fld>
             <a:endParaRPr lang="en-US"/>
           </a:p>
@@ -2184,7 +2429,7 @@
             <a:pPr eaLnBrk="1" latinLnBrk="0" hangingPunct="1"/>
             <a:fld id="{00065D69-4622-413E-9E09-6A2509001B66}" type="datetime1">
               <a:rPr lang="en-US" smtClean="0"/>
-              <a:t>10/4/2025</a:t>
+              <a:t>10/21/2025</a:t>
             </a:fld>
             <a:endParaRPr lang="en-US" dirty="0"/>
           </a:p>
@@ -2454,7 +2699,7 @@
             <a:pPr eaLnBrk="1" latinLnBrk="0" hangingPunct="1"/>
             <a:fld id="{26D84756-85D3-4017-90AB-B482945A0CB0}" type="datetime1">
               <a:rPr lang="en-US" smtClean="0"/>
-              <a:t>10/4/2025</a:t>
+              <a:t>10/21/2025</a:t>
             </a:fld>
             <a:endParaRPr lang="en-US" dirty="0"/>
           </a:p>
@@ -2675,7 +2920,7 @@
             <a:pPr eaLnBrk="1" latinLnBrk="0" hangingPunct="1"/>
             <a:fld id="{1359E9A9-3822-4D57-8A64-831B26641011}" type="datetime1">
               <a:rPr lang="en-US" smtClean="0"/>
-              <a:t>10/4/2025</a:t>
+              <a:t>10/21/2025</a:t>
             </a:fld>
             <a:endParaRPr lang="en-US"/>
           </a:p>
@@ -3028,7 +3273,7 @@
             <a:pPr eaLnBrk="1" latinLnBrk="0" hangingPunct="1"/>
             <a:fld id="{F96C45A0-00E6-4B4B-A1A7-CF1486D67AF4}" type="datetime1">
               <a:rPr lang="en-US" smtClean="0"/>
-              <a:t>10/4/2025</a:t>
+              <a:t>10/21/2025</a:t>
             </a:fld>
             <a:endParaRPr lang="en-US"/>
           </a:p>
@@ -3261,7 +3506,7 @@
             <a:pPr eaLnBrk="1" latinLnBrk="0" hangingPunct="1"/>
             <a:fld id="{B88C3861-EF45-4815-A76E-294671FAB405}" type="datetime1">
               <a:rPr lang="en-US" smtClean="0"/>
-              <a:t>10/4/2025</a:t>
+              <a:t>10/21/2025</a:t>
             </a:fld>
             <a:endParaRPr lang="en-US"/>
           </a:p>
@@ -3403,7 +3648,7 @@
             <a:pPr eaLnBrk="1" latinLnBrk="0" hangingPunct="1"/>
             <a:fld id="{0F0B8080-ED7A-45A9-A704-76D750342F93}" type="datetime1">
               <a:rPr lang="en-US" smtClean="0"/>
-              <a:t>10/4/2025</a:t>
+              <a:t>10/21/2025</a:t>
             </a:fld>
             <a:endParaRPr lang="en-US"/>
           </a:p>
@@ -3681,7 +3926,7 @@
             <a:pPr eaLnBrk="1" latinLnBrk="0" hangingPunct="1"/>
             <a:fld id="{D1503A19-0780-4B28-9CCB-B5B1820188BD}" type="datetime1">
               <a:rPr lang="en-US" smtClean="0"/>
-              <a:t>10/4/2025</a:t>
+              <a:t>10/21/2025</a:t>
             </a:fld>
             <a:endParaRPr lang="en-US"/>
           </a:p>
@@ -4089,7 +4334,7 @@
             <a:pPr eaLnBrk="1" latinLnBrk="0" hangingPunct="1"/>
             <a:fld id="{2142A9E5-AE71-46A9-A65E-9BA279401128}" type="datetime1">
               <a:rPr lang="en-US" smtClean="0"/>
-              <a:t>10/4/2025</a:t>
+              <a:t>10/21/2025</a:t>
             </a:fld>
             <a:endParaRPr lang="en-US"/>
           </a:p>
@@ -4427,7 +4672,7 @@
             <a:pPr eaLnBrk="1" latinLnBrk="0" hangingPunct="1"/>
             <a:fld id="{4087DD3F-948A-46ED-B3EC-5D68A963D0B7}" type="datetime1">
               <a:rPr lang="en-US" smtClean="0"/>
-              <a:t>10/4/2025</a:t>
+              <a:t>10/21/2025</a:t>
             </a:fld>
             <a:endParaRPr lang="en-US" sz="1400" dirty="0">
               <a:solidFill>
@@ -6564,6 +6809,341 @@
     <p:extLst>
       <p:ext uri="{BB962C8B-B14F-4D97-AF65-F5344CB8AC3E}">
         <p14:creationId xmlns:p14="http://schemas.microsoft.com/office/powerpoint/2010/main" val="2017314449"/>
+      </p:ext>
+    </p:extLst>
+  </p:cSld>
+  <p:clrMapOvr>
+    <a:masterClrMapping/>
+  </p:clrMapOvr>
+</p:sld>
+</file>
+
+<file path=ppt/slides/slide12.xml><?xml version="1.0" encoding="utf-8"?>
+<p:sld xmlns:a="http://schemas.openxmlformats.org/drawingml/2006/main" xmlns:r="http://schemas.openxmlformats.org/officeDocument/2006/relationships" xmlns:p="http://schemas.openxmlformats.org/presentationml/2006/main">
+  <p:cSld>
+    <p:spTree>
+      <p:nvGrpSpPr>
+        <p:cNvPr id="1" name=""/>
+        <p:cNvGrpSpPr/>
+        <p:nvPr/>
+      </p:nvGrpSpPr>
+      <p:grpSpPr>
+        <a:xfrm>
+          <a:off x="0" y="0"/>
+          <a:ext cx="0" cy="0"/>
+          <a:chOff x="0" y="0"/>
+          <a:chExt cx="0" cy="0"/>
+        </a:xfrm>
+      </p:grpSpPr>
+      <p:sp>
+        <p:nvSpPr>
+          <p:cNvPr id="2" name="Title 1">
+            <a:extLst>
+              <a:ext uri="{FF2B5EF4-FFF2-40B4-BE49-F238E27FC236}">
+                <a16:creationId xmlns:a16="http://schemas.microsoft.com/office/drawing/2014/main" id="{0CCDC4F0-89D8-54C1-7B5F-442BB66DAAA7}"/>
+              </a:ext>
+            </a:extLst>
+          </p:cNvPr>
+          <p:cNvSpPr>
+            <a:spLocks noGrp="1"/>
+          </p:cNvSpPr>
+          <p:nvPr>
+            <p:ph type="title"/>
+          </p:nvPr>
+        </p:nvSpPr>
+        <p:spPr/>
+        <p:txBody>
+          <a:bodyPr/>
+          <a:lstStyle/>
+          <a:p>
+            <a:r>
+              <a:rPr lang="en-US" dirty="0"/>
+              <a:t>Program Understanding</a:t>
+            </a:r>
+          </a:p>
+        </p:txBody>
+      </p:sp>
+      <p:sp>
+        <p:nvSpPr>
+          <p:cNvPr id="3" name="Slide Number Placeholder 2">
+            <a:extLst>
+              <a:ext uri="{FF2B5EF4-FFF2-40B4-BE49-F238E27FC236}">
+                <a16:creationId xmlns:a16="http://schemas.microsoft.com/office/drawing/2014/main" id="{04ACEC4B-05BD-C502-9FB9-FEB63BA9F5F4}"/>
+              </a:ext>
+            </a:extLst>
+          </p:cNvPr>
+          <p:cNvSpPr>
+            <a:spLocks noGrp="1"/>
+          </p:cNvSpPr>
+          <p:nvPr>
+            <p:ph type="sldNum" sz="quarter" idx="12"/>
+          </p:nvPr>
+        </p:nvSpPr>
+        <p:spPr/>
+        <p:txBody>
+          <a:bodyPr/>
+          <a:lstStyle/>
+          <a:p>
+            <a:fld id="{EA7C8D44-3667-46F6-9772-CC52308E2A7F}" type="slidenum">
+              <a:rPr kumimoji="0" lang="en-US" smtClean="0"/>
+              <a:pPr/>
+              <a:t>12</a:t>
+            </a:fld>
+            <a:endParaRPr kumimoji="0" lang="en-US" dirty="0"/>
+          </a:p>
+        </p:txBody>
+      </p:sp>
+      <p:sp>
+        <p:nvSpPr>
+          <p:cNvPr id="4" name="Content Placeholder 3">
+            <a:extLst>
+              <a:ext uri="{FF2B5EF4-FFF2-40B4-BE49-F238E27FC236}">
+                <a16:creationId xmlns:a16="http://schemas.microsoft.com/office/drawing/2014/main" id="{4C97CD4C-D1B7-839F-818C-C650C0AA8892}"/>
+              </a:ext>
+            </a:extLst>
+          </p:cNvPr>
+          <p:cNvSpPr>
+            <a:spLocks noGrp="1"/>
+          </p:cNvSpPr>
+          <p:nvPr>
+            <p:ph sz="quarter" idx="1"/>
+          </p:nvPr>
+        </p:nvSpPr>
+        <p:spPr/>
+        <p:txBody>
+          <a:bodyPr/>
+          <a:lstStyle/>
+          <a:p>
+            <a:r>
+              <a:rPr lang="en-US" dirty="0"/>
+              <a:t>Write out the sequence of values of r0 and r7 after running this program. </a:t>
+            </a:r>
+          </a:p>
+        </p:txBody>
+      </p:sp>
+      <p:sp>
+        <p:nvSpPr>
+          <p:cNvPr id="5" name="TextBox 4">
+            <a:extLst>
+              <a:ext uri="{FF2B5EF4-FFF2-40B4-BE49-F238E27FC236}">
+                <a16:creationId xmlns:a16="http://schemas.microsoft.com/office/drawing/2014/main" id="{E5333230-46BA-8663-0449-A907C073A049}"/>
+              </a:ext>
+            </a:extLst>
+          </p:cNvPr>
+          <p:cNvSpPr txBox="1"/>
+          <p:nvPr/>
+        </p:nvSpPr>
+        <p:spPr>
+          <a:xfrm>
+            <a:off x="866618" y="2125087"/>
+            <a:ext cx="3454460" cy="4031873"/>
+          </a:xfrm>
+          <a:prstGeom prst="rect">
+            <a:avLst/>
+          </a:prstGeom>
+        </p:spPr>
+        <p:style>
+          <a:lnRef idx="2">
+            <a:schemeClr val="accent1"/>
+          </a:lnRef>
+          <a:fillRef idx="1">
+            <a:schemeClr val="lt1"/>
+          </a:fillRef>
+          <a:effectRef idx="0">
+            <a:schemeClr val="accent1"/>
+          </a:effectRef>
+          <a:fontRef idx="minor">
+            <a:schemeClr val="dk1"/>
+          </a:fontRef>
+        </p:style>
+        <p:txBody>
+          <a:bodyPr wrap="square" rtlCol="0">
+            <a:spAutoFit/>
+          </a:bodyPr>
+          <a:lstStyle/>
+          <a:p>
+            <a:r>
+              <a:rPr lang="en-US" sz="1600" dirty="0">
+                <a:latin typeface="Consolas" panose="020B0609020204030204" pitchFamily="49" charset="0"/>
+                <a:cs typeface="Consolas" panose="020B0609020204030204" pitchFamily="49" charset="0"/>
+              </a:rPr>
+              <a:t>start:</a:t>
+            </a:r>
+          </a:p>
+          <a:p>
+            <a:r>
+              <a:rPr lang="en-US" sz="1600" dirty="0">
+                <a:latin typeface="Consolas" panose="020B0609020204030204" pitchFamily="49" charset="0"/>
+                <a:cs typeface="Consolas" panose="020B0609020204030204" pitchFamily="49" charset="0"/>
+              </a:rPr>
+              <a:t>        mov     r0, #1       </a:t>
+            </a:r>
+          </a:p>
+          <a:p>
+            <a:endParaRPr lang="en-US" sz="1600" dirty="0">
+              <a:latin typeface="Consolas" panose="020B0609020204030204" pitchFamily="49" charset="0"/>
+              <a:cs typeface="Consolas" panose="020B0609020204030204" pitchFamily="49" charset="0"/>
+            </a:endParaRPr>
+          </a:p>
+          <a:p>
+            <a:r>
+              <a:rPr lang="en-US" sz="1600" dirty="0">
+                <a:latin typeface="Consolas" panose="020B0609020204030204" pitchFamily="49" charset="0"/>
+                <a:cs typeface="Consolas" panose="020B0609020204030204" pitchFamily="49" charset="0"/>
+              </a:rPr>
+              <a:t>main:</a:t>
+            </a:r>
+          </a:p>
+          <a:p>
+            <a:r>
+              <a:rPr lang="en-US" sz="1600" dirty="0">
+                <a:latin typeface="Consolas" panose="020B0609020204030204" pitchFamily="49" charset="0"/>
+                <a:cs typeface="Consolas" panose="020B0609020204030204" pitchFamily="49" charset="0"/>
+              </a:rPr>
+              <a:t>        add     r0, r0, #1</a:t>
+            </a:r>
+          </a:p>
+          <a:p>
+            <a:r>
+              <a:rPr lang="en-US" sz="1600" dirty="0">
+                <a:latin typeface="Consolas" panose="020B0609020204030204" pitchFamily="49" charset="0"/>
+                <a:cs typeface="Consolas" panose="020B0609020204030204" pitchFamily="49" charset="0"/>
+              </a:rPr>
+              <a:t>        </a:t>
+            </a:r>
+            <a:r>
+              <a:rPr lang="en-US" sz="1600" dirty="0" err="1">
+                <a:latin typeface="Consolas" panose="020B0609020204030204" pitchFamily="49" charset="0"/>
+                <a:cs typeface="Consolas" panose="020B0609020204030204" pitchFamily="49" charset="0"/>
+              </a:rPr>
+              <a:t>cmp</a:t>
+            </a:r>
+            <a:r>
+              <a:rPr lang="en-US" sz="1600" dirty="0">
+                <a:latin typeface="Consolas" panose="020B0609020204030204" pitchFamily="49" charset="0"/>
+                <a:cs typeface="Consolas" panose="020B0609020204030204" pitchFamily="49" charset="0"/>
+              </a:rPr>
+              <a:t>     r0, #5       </a:t>
+            </a:r>
+          </a:p>
+          <a:p>
+            <a:r>
+              <a:rPr lang="en-US" sz="1600" dirty="0">
+                <a:latin typeface="Consolas" panose="020B0609020204030204" pitchFamily="49" charset="0"/>
+                <a:cs typeface="Consolas" panose="020B0609020204030204" pitchFamily="49" charset="0"/>
+              </a:rPr>
+              <a:t>        </a:t>
+            </a:r>
+            <a:r>
+              <a:rPr lang="en-US" sz="1600" dirty="0" err="1">
+                <a:latin typeface="Consolas" panose="020B0609020204030204" pitchFamily="49" charset="0"/>
+                <a:cs typeface="Consolas" panose="020B0609020204030204" pitchFamily="49" charset="0"/>
+              </a:rPr>
+              <a:t>bne</a:t>
+            </a:r>
+            <a:r>
+              <a:rPr lang="en-US" sz="1600" dirty="0">
+                <a:latin typeface="Consolas" panose="020B0609020204030204" pitchFamily="49" charset="0"/>
+                <a:cs typeface="Consolas" panose="020B0609020204030204" pitchFamily="49" charset="0"/>
+              </a:rPr>
+              <a:t>     skip         </a:t>
+            </a:r>
+          </a:p>
+          <a:p>
+            <a:r>
+              <a:rPr lang="en-US" sz="1600" dirty="0">
+                <a:latin typeface="Consolas" panose="020B0609020204030204" pitchFamily="49" charset="0"/>
+                <a:cs typeface="Consolas" panose="020B0609020204030204" pitchFamily="49" charset="0"/>
+              </a:rPr>
+              <a:t>        bl      call</a:t>
+            </a:r>
+          </a:p>
+          <a:p>
+            <a:endParaRPr lang="en-US" sz="1600" dirty="0">
+              <a:latin typeface="Consolas" panose="020B0609020204030204" pitchFamily="49" charset="0"/>
+              <a:cs typeface="Consolas" panose="020B0609020204030204" pitchFamily="49" charset="0"/>
+            </a:endParaRPr>
+          </a:p>
+          <a:p>
+            <a:r>
+              <a:rPr lang="en-US" sz="1600" dirty="0">
+                <a:latin typeface="Consolas" panose="020B0609020204030204" pitchFamily="49" charset="0"/>
+                <a:cs typeface="Consolas" panose="020B0609020204030204" pitchFamily="49" charset="0"/>
+              </a:rPr>
+              <a:t>skip:</a:t>
+            </a:r>
+          </a:p>
+          <a:p>
+            <a:r>
+              <a:rPr lang="en-US" sz="1600" dirty="0">
+                <a:latin typeface="Consolas" panose="020B0609020204030204" pitchFamily="49" charset="0"/>
+                <a:cs typeface="Consolas" panose="020B0609020204030204" pitchFamily="49" charset="0"/>
+              </a:rPr>
+              <a:t>        b       main         </a:t>
+            </a:r>
+          </a:p>
+          <a:p>
+            <a:endParaRPr lang="en-US" sz="1600" dirty="0">
+              <a:latin typeface="Consolas" panose="020B0609020204030204" pitchFamily="49" charset="0"/>
+              <a:cs typeface="Consolas" panose="020B0609020204030204" pitchFamily="49" charset="0"/>
+            </a:endParaRPr>
+          </a:p>
+          <a:p>
+            <a:r>
+              <a:rPr lang="en-US" sz="1600" dirty="0">
+                <a:latin typeface="Consolas" panose="020B0609020204030204" pitchFamily="49" charset="0"/>
+                <a:cs typeface="Consolas" panose="020B0609020204030204" pitchFamily="49" charset="0"/>
+              </a:rPr>
+              <a:t>call:</a:t>
+            </a:r>
+          </a:p>
+          <a:p>
+            <a:r>
+              <a:rPr lang="en-US" sz="1600" dirty="0">
+                <a:latin typeface="Consolas" panose="020B0609020204030204" pitchFamily="49" charset="0"/>
+                <a:cs typeface="Consolas" panose="020B0609020204030204" pitchFamily="49" charset="0"/>
+              </a:rPr>
+              <a:t>        add     r7, r7, #255</a:t>
+            </a:r>
+          </a:p>
+          <a:p>
+            <a:r>
+              <a:rPr lang="en-US" sz="1600" dirty="0">
+                <a:latin typeface="Consolas" panose="020B0609020204030204" pitchFamily="49" charset="0"/>
+                <a:cs typeface="Consolas" panose="020B0609020204030204" pitchFamily="49" charset="0"/>
+              </a:rPr>
+              <a:t>        mov     r0, #1       </a:t>
+            </a:r>
+          </a:p>
+          <a:p>
+            <a:r>
+              <a:rPr lang="en-US" sz="1600" dirty="0">
+                <a:latin typeface="Consolas" panose="020B0609020204030204" pitchFamily="49" charset="0"/>
+                <a:cs typeface="Consolas" panose="020B0609020204030204" pitchFamily="49" charset="0"/>
+              </a:rPr>
+              <a:t>        bx      </a:t>
+            </a:r>
+            <a:r>
+              <a:rPr lang="en-US" sz="1600" dirty="0" err="1">
+                <a:latin typeface="Consolas" panose="020B0609020204030204" pitchFamily="49" charset="0"/>
+                <a:cs typeface="Consolas" panose="020B0609020204030204" pitchFamily="49" charset="0"/>
+              </a:rPr>
+              <a:t>lr</a:t>
+            </a:r>
+            <a:r>
+              <a:rPr lang="en-US" sz="1600" dirty="0">
+                <a:latin typeface="Consolas" panose="020B0609020204030204" pitchFamily="49" charset="0"/>
+                <a:cs typeface="Consolas" panose="020B0609020204030204" pitchFamily="49" charset="0"/>
+              </a:rPr>
+              <a:t>         </a:t>
+            </a:r>
+          </a:p>
+        </p:txBody>
+      </p:sp>
+    </p:spTree>
+    <p:extLst>
+      <p:ext uri="{BB962C8B-B14F-4D97-AF65-F5344CB8AC3E}">
+        <p14:creationId xmlns:p14="http://schemas.microsoft.com/office/powerpoint/2010/main" val="4214831448"/>
       </p:ext>
     </p:extLst>
   </p:cSld>
